--- a/docs/PITCH_DECK.pptx
+++ b/docs/PITCH_DECK.pptx
@@ -779,7 +779,7 @@
           </a:p>
           <a:p>
             <a:r>
-              <a:t>الأمان في هذا المجال أولوية مطلقة. قبل أن يصل النص إلى محرك الصياغة، تفحص طبقة الحارس عبارات الأزمة باللهجة الليبية بدقة 100%. وإذا وُجد خطر، تتوقف الصياغة وتظهر بطاقة دعم بشرية موثوقة بدون أرقام وهمية. وتمنع فلترة المخرجات 55 مصطلحاً طبياً من الظهور في أي مسودة. وعلى صعيد الخصوصية: جسر لا يطلب حساباً ولا يحتفظ بأي أثر للرسائل على أي سيرفر خارجي. لحظات الضعف تبقى ملكاً للمستخدم وحده.</a:t>
+              <a:t>الأمان في هذا المجال أولوية مطلقة. قبل أن يصل النص إلى محرك الصياغة، تفحص طبقة الحارس عبارات الأزمة باللهجة الليبية على الهاتف وعلى الخادم. وإذا وُجد خطر، تتوقف الصياغة وتظهر بطاقة دعم بشرية موثوقة بدون أرقام وهمية. وتمنع فلترة المخرجات 55 مصطلحاً طبياً من الظهور في أي مسودة. وعلى صعيد الخصوصية: جسر لا يطلب حساباً ولا يحتفظ بأي أثر للرسائل على أي سيرفر خارجي. لحظات الضعف تبقى ملكاً للمستخدم وحده.</a:t>
             </a:r>
           </a:p>
           <a:p/>
@@ -790,7 +790,7 @@
           </a:p>
           <a:p>
             <a:r>
-              <a:t>Safety in this space cannot be an afterthought. Before any text ever reaches drafting, our Guardian Layer screens for crisis indicators across Libyan dialect with 100% recall. If crisis is detected, drafting stops immediately and a verified human support card is presented. Furthermore, our output filter guarantees no clinical diagnoses or medication terms can ever appear. And on privacy: Jisr requires no accounts, no logins, and retains zero data on any server.</a:t>
+              <a:t>Safety in this space cannot be an afterthought. Before any text ever reaches drafting, our Guardian Layer screens for crisis indicators across Libyan dialect, on the phone and again on the server. If crisis is detected, drafting stops immediately and a static support card is presented; it shows no unverified numbers. Our output filter blocks clinical diagnoses and medication terms. And on privacy: Jisr requires no accounts, no logins, and our server keeps nothing; names and numbers are removed before anything is sent.</a:t>
             </a:r>
           </a:p>
         </p:txBody>
@@ -7127,7 +7127,7 @@
               </a:defRPr>
             </a:pPr>
             <a:r>
-              <a:t>• نسبة التقاط الأزمات (Crisis Recall): 100.0% (10/10 حالات — مجال ويلسون 72.2% – 100%)</a:t>
+              <a:t>• نسبة التقاط الأزمات (Crisis Recall): 90.9% (10 من 11 حالة على مجموعة التطوير — مجال ويلسون 62.3% – 98.4%)</a:t>
             </a:r>
           </a:p>
           <a:p>
@@ -7727,7 +7727,7 @@
               </a:defRPr>
             </a:pPr>
             <a:r>
-              <a:t>استهلاك شبكة خفيف جداً (&lt;2KB)، مع تحول تلقائي وفوري للقوالب المحلية (safety/plain-templates.json) عند انقطاع الاتصال.</a:t>
+              <a:t>استهلاك شبكة خفيف جداً (بضعة أسطر نص فقط)، مع تحول تلقائي وفوري للقوالب المحلية (safety/plain-templates.json) عند انقطاع الاتصال.</a:t>
             </a:r>
           </a:p>
           <a:p>
@@ -7791,7 +7791,7 @@
               </a:defRPr>
             </a:pPr>
             <a:r>
-              <a:t>مشاركة بضغطة زر واحدة عبر التطبيقات التي يستخدمها أكثر من 90% من شباب ليبيا دون أي خادم وسيط.</a:t>
+              <a:t>مشاركة بضغطة زر واحدة عبر التطبيقات التي يستخدمها شباب ليبيا يومياً دون أي خادم وسيط.</a:t>
             </a:r>
           </a:p>
         </p:txBody>
@@ -7969,7 +7969,7 @@
               </a:defRPr>
             </a:pPr>
             <a:r>
-              <a:t>خادم FastAPI المستقل، توجيه نماذج Gemini 1.5 Flash و Groq Llama 3.3، وتطهير البيانات الحساسة PII.</a:t>
+              <a:t>خادم FastAPI المستقل، نموذج Google Gemini (gemini-flash-lite-latest)، وتطهير البيانات الحساسة PII.</a:t>
             </a:r>
           </a:p>
           <a:p>
